--- a/proposal/Presentations/GNSS_Proposal_Presentation_v3.pptx
+++ b/proposal/Presentations/GNSS_Proposal_Presentation_v3.pptx
@@ -15120,7 +15120,7 @@
                   <a:srgbClr val="0D1B2A"/>
                 </a:solidFill>
               </a:rPr>
-              <a:t>Septentrio scenarios (A–E)</a:t>
+              <a:t>Scenarios A-E</a:t>
             </a:r>
           </a:p>
         </p:txBody>
@@ -15188,7 +15188,7 @@
                   <a:srgbClr val="0D1B2A"/>
                 </a:solidFill>
               </a:rPr>
-              <a:t>MOSAIC-X5C</a:t>
+              <a:t>Septentrio</a:t>
             </a:r>
           </a:p>
         </p:txBody>
@@ -15222,7 +15222,7 @@
                   <a:srgbClr val="0D1B2A"/>
                 </a:solidFill>
               </a:rPr>
-              <a:t>~6 000</a:t>
+              <a:t>3,586</a:t>
             </a:r>
           </a:p>
         </p:txBody>
@@ -15336,7 +15336,7 @@
                   <a:srgbClr val="0D1B2A"/>
                 </a:solidFill>
               </a:rPr>
-              <a:t>Supervisor Vehicle (×4)</a:t>
+              <a:t>Supervisor Vehicle</a:t>
             </a:r>
           </a:p>
         </p:txBody>
@@ -15404,7 +15404,7 @@
                   <a:srgbClr val="0D1B2A"/>
                 </a:solidFill>
               </a:rPr>
-              <a:t>u-blox F9P</a:t>
+              <a:t>Septentrio</a:t>
             </a:r>
           </a:p>
         </p:txBody>
@@ -15438,7 +15438,7 @@
                   <a:srgbClr val="0D1B2A"/>
                 </a:solidFill>
               </a:rPr>
-              <a:t>~5 000</a:t>
+              <a:t>3,401</a:t>
             </a:r>
           </a:p>
         </p:txBody>
@@ -15552,7 +15552,7 @@
                   <a:srgbClr val="0D1B2A"/>
                 </a:solidFill>
               </a:rPr>
-              <a:t>Supervisor Drone</a:t>
+              <a:t>Supervisor Vehicle (ref)</a:t>
             </a:r>
           </a:p>
         </p:txBody>
@@ -15620,7 +15620,7 @@
                   <a:srgbClr val="0D1B2A"/>
                 </a:solidFill>
               </a:rPr>
-              <a:t>u-blox F9P</a:t>
+              <a:t>Septentrio</a:t>
             </a:r>
           </a:p>
         </p:txBody>
@@ -15654,7 +15654,7 @@
                   <a:srgbClr val="0D1B2A"/>
                 </a:solidFill>
               </a:rPr>
-              <a:t>~2 000</a:t>
+              <a:t>3,739</a:t>
             </a:r>
           </a:p>
         </p:txBody>
@@ -15688,7 +15688,7 @@
                   <a:srgbClr val="0D1B2A"/>
                 </a:solidFill>
               </a:rPr>
-              <a:t>D E</a:t>
+              <a:t>D</a:t>
             </a:r>
           </a:p>
         </p:txBody>
@@ -15768,7 +15768,7 @@
                   <a:srgbClr val="0D1B2A"/>
                 </a:solidFill>
               </a:rPr>
-              <a:t>NCLT (2 dates)</a:t>
+              <a:t>Supervisor Drone</a:t>
             </a:r>
           </a:p>
         </p:txBody>
@@ -15802,7 +15802,7 @@
                   <a:srgbClr val="0D1B2A"/>
                 </a:solidFill>
               </a:rPr>
-              <a:t>Ann Arbor, USA</a:t>
+              <a:t>Beijing, China</a:t>
             </a:r>
           </a:p>
         </p:txBody>
@@ -15836,7 +15836,7 @@
                   <a:srgbClr val="0D1B2A"/>
                 </a:solidFill>
               </a:rPr>
-              <a:t>Velodyne+IMU</a:t>
+              <a:t>Unicore UB4B0</a:t>
             </a:r>
           </a:p>
         </p:txBody>
@@ -15870,7 +15870,7 @@
                   <a:srgbClr val="0D1B2A"/>
                 </a:solidFill>
               </a:rPr>
-              <a:t>~14 400</a:t>
+              <a:t>11,123</a:t>
             </a:r>
           </a:p>
         </p:txBody>
@@ -15904,7 +15904,7 @@
                   <a:srgbClr val="0D1B2A"/>
                 </a:solidFill>
               </a:rPr>
-              <a:t>B D</a:t>
+              <a:t>D</a:t>
             </a:r>
           </a:p>
         </p:txBody>
@@ -15984,7 +15984,7 @@
                   <a:srgbClr val="0D1B2A"/>
                 </a:solidFill>
               </a:rPr>
-              <a:t>Oxford RobotCar (×4)</a:t>
+              <a:t>UrbanNav HK Medium</a:t>
             </a:r>
           </a:p>
         </p:txBody>
@@ -16018,7 +16018,7 @@
                   <a:srgbClr val="0D1B2A"/>
                 </a:solidFill>
               </a:rPr>
-              <a:t>Oxford, UK</a:t>
+              <a:t>Hong Kong, China</a:t>
             </a:r>
           </a:p>
         </p:txBody>
@@ -16052,7 +16052,7 @@
                   <a:srgbClr val="0D1B2A"/>
                 </a:solidFill>
               </a:rPr>
-              <a:t>NovAtel</a:t>
+              <a:t>10 receivers</a:t>
             </a:r>
           </a:p>
         </p:txBody>
@@ -16086,7 +16086,7 @@
                   <a:srgbClr val="0D1B2A"/>
                 </a:solidFill>
               </a:rPr>
-              <a:t>~10 800</a:t>
+              <a:t>7,608</a:t>
             </a:r>
           </a:p>
         </p:txBody>
@@ -16120,7 +16120,7 @@
                   <a:srgbClr val="0D1B2A"/>
                 </a:solidFill>
               </a:rPr>
-              <a:t>B C D</a:t>
+              <a:t>B C</a:t>
             </a:r>
           </a:p>
         </p:txBody>
@@ -16200,7 +16200,7 @@
                   <a:srgbClr val="0D1B2A"/>
                 </a:solidFill>
               </a:rPr>
-              <a:t>UrbanNav HK</a:t>
+              <a:t>UrbanNav HK Tunnel</a:t>
             </a:r>
           </a:p>
         </p:txBody>
@@ -16268,7 +16268,7 @@
                   <a:srgbClr val="0D1B2A"/>
                 </a:solidFill>
               </a:rPr>
-              <a:t>u-blox ZED</a:t>
+              <a:t>10 receivers</a:t>
             </a:r>
           </a:p>
         </p:txBody>
@@ -16302,7 +16302,7 @@
                   <a:srgbClr val="0D1B2A"/>
                 </a:solidFill>
               </a:rPr>
-              <a:t>~8 200</a:t>
+              <a:t>3,461</a:t>
             </a:r>
           </a:p>
         </p:txBody>
@@ -16336,7 +16336,7 @@
                   <a:srgbClr val="0D1B2A"/>
                 </a:solidFill>
               </a:rPr>
-              <a:t>A B C D</a:t>
+              <a:t>A E</a:t>
             </a:r>
           </a:p>
         </p:txBody>
@@ -16518,7 +16518,7 @@
                   <a:srgbClr val="0D1B2A"/>
                 </a:solidFill>
               </a:rPr>
-              <a:t>~5 500</a:t>
+              <a:t>18,603</a:t>
             </a:r>
           </a:p>
         </p:txBody>
@@ -16734,7 +16734,7 @@
                   <a:srgbClr val="0D1B2A"/>
                 </a:solidFill>
               </a:rPr>
-              <a:t>~5 500</a:t>
+              <a:t>31,265</a:t>
             </a:r>
           </a:p>
         </p:txBody>
@@ -16848,7 +16848,7 @@
                   <a:srgbClr val="0D1B2A"/>
                 </a:solidFill>
               </a:rPr>
-              <a:t>Phone A (GNSS Logger)</a:t>
+              <a:t>NCLT (2 sessions)</a:t>
             </a:r>
           </a:p>
         </p:txBody>
@@ -16882,7 +16882,7 @@
                   <a:srgbClr val="0D1B2A"/>
                 </a:solidFill>
               </a:rPr>
-              <a:t>Beijing, China</a:t>
+              <a:t>Ann Arbor, USA</a:t>
             </a:r>
           </a:p>
         </p:txBody>
@@ -16916,7 +16916,7 @@
                   <a:srgbClr val="0D1B2A"/>
                 </a:solidFill>
               </a:rPr>
-              <a:t>Smartphone</a:t>
+              <a:t>GPS + LiDAR GT</a:t>
             </a:r>
           </a:p>
         </p:txBody>
@@ -16950,7 +16950,7 @@
                   <a:srgbClr val="0D1B2A"/>
                 </a:solidFill>
               </a:rPr>
-              <a:t>~4 000</a:t>
+              <a:t>7,493</a:t>
             </a:r>
           </a:p>
         </p:txBody>
@@ -16984,7 +16984,7 @@
                   <a:srgbClr val="0D1B2A"/>
                 </a:solidFill>
               </a:rPr>
-              <a:t>A B C D E</a:t>
+              <a:t>B D</a:t>
             </a:r>
           </a:p>
         </p:txBody>
@@ -17064,7 +17064,7 @@
                   <a:srgbClr val="0D1B2A"/>
                 </a:solidFill>
               </a:rPr>
-              <a:t>Phone B (GPX/GNSS Logger)</a:t>
+              <a:t>Oxford RobotCar (2 sessions)</a:t>
             </a:r>
           </a:p>
         </p:txBody>
@@ -17098,7 +17098,7 @@
                   <a:srgbClr val="0D1B2A"/>
                 </a:solidFill>
               </a:rPr>
-              <a:t>Beijing, China</a:t>
+              <a:t>Oxford, UK</a:t>
             </a:r>
           </a:p>
         </p:txBody>
@@ -17132,7 +17132,7 @@
                   <a:srgbClr val="0D1B2A"/>
                 </a:solidFill>
               </a:rPr>
-              <a:t>Smartphone</a:t>
+              <a:t>NovAtel OEM6</a:t>
             </a:r>
           </a:p>
         </p:txBody>
@@ -17166,7 +17166,7 @@
                   <a:srgbClr val="0D1B2A"/>
                 </a:solidFill>
               </a:rPr>
-              <a:t>~4 000</a:t>
+              <a:t>7,114</a:t>
             </a:r>
           </a:p>
         </p:txBody>
@@ -17200,7 +17200,7 @@
                   <a:srgbClr val="0D1B2A"/>
                 </a:solidFill>
               </a:rPr>
-              <a:t>A B C D E</a:t>
+              <a:t>B C D</a:t>
             </a:r>
           </a:p>
         </p:txBody>
